--- a/static/decks/ADCB.AE.pptx
+++ b/static/decks/ADCB.AE.pptx
@@ -3339,7 +3339,7 @@
                 </a:solidFill>
                 <a:latin typeface="Georgia"/>
               </a:rPr>
-              <a:t>ADCB.AE</a:t>
+              <a:t>Abu Dhabi Commercial Bank P.J.S.C.</a:t>
             </a:r>
           </a:p>
         </p:txBody>
@@ -3374,7 +3374,7 @@
                 </a:solidFill>
                 <a:latin typeface="Calibri"/>
               </a:rPr>
-              <a:t>ADCB.AE  ·  —  ·  —  ·  —</a:t>
+              <a:t>ADCB.AE  ·  Financials  ·  Banks  ·  —</a:t>
             </a:r>
           </a:p>
         </p:txBody>
@@ -3613,7 +3613,7 @@
                 </a:solidFill>
                 <a:latin typeface="Calibri"/>
               </a:rPr>
-              <a:t>RATING  ·  11 ANALYSTS</a:t>
+              <a:t>RATING  ·  16 ANALYSTS</a:t>
             </a:r>
           </a:p>
         </p:txBody>
@@ -3808,7 +3808,7 @@
                 </a:solidFill>
                 <a:latin typeface="Calibri"/>
               </a:rPr>
-              <a:t>11.32</a:t>
+              <a:t>AED 17.73</a:t>
             </a:r>
           </a:p>
         </p:txBody>
@@ -3968,7 +3968,7 @@
                 </a:solidFill>
                 <a:latin typeface="Calibri"/>
               </a:rPr>
-              <a:t>+2164.0%</a:t>
+              <a:t>+25.9%</a:t>
             </a:r>
           </a:p>
         </p:txBody>
@@ -4117,7 +4117,7 @@
                 </a:solidFill>
                 <a:latin typeface="Calibri"/>
               </a:rPr>
-              <a:t>0.50</a:t>
+              <a:t>AED 14.08</a:t>
             </a:r>
           </a:p>
         </p:txBody>
@@ -4187,7 +4187,7 @@
                 </a:solidFill>
                 <a:latin typeface="Calibri"/>
               </a:rPr>
-              <a:t>—</a:t>
+              <a:t>AED 109.1B</a:t>
             </a:r>
           </a:p>
         </p:txBody>
@@ -4327,7 +4327,7 @@
                 </a:solidFill>
                 <a:latin typeface="Calibri"/>
               </a:rPr>
-              <a:t>—</a:t>
+              <a:t>7.2x</a:t>
             </a:r>
           </a:p>
         </p:txBody>
@@ -4397,7 +4397,7 @@
                 </a:solidFill>
                 <a:latin typeface="Calibri"/>
               </a:rPr>
-              <a:t>—</a:t>
+              <a:t>5.55%</a:t>
             </a:r>
           </a:p>
         </p:txBody>
@@ -4467,7 +4467,7 @@
                 </a:solidFill>
                 <a:latin typeface="Calibri"/>
               </a:rPr>
-              <a:t/>
+              <a:t>AED</a:t>
             </a:r>
           </a:p>
         </p:txBody>
@@ -5080,7 +5080,7 @@
                 </a:solidFill>
                 <a:latin typeface="Calibri"/>
               </a:rPr>
-              <a:t> 0.00</a:t>
+              <a:t>AED 12.67</a:t>
             </a:r>
           </a:p>
         </p:txBody>
@@ -5115,7 +5115,7 @@
                 </a:solidFill>
                 <a:latin typeface="Calibri"/>
               </a:rPr>
-              <a:t> 1.00</a:t>
+              <a:t>AED 15.49</a:t>
             </a:r>
           </a:p>
         </p:txBody>
@@ -5257,7 +5257,7 @@
         </p:nvSpPr>
         <p:spPr>
           <a:xfrm>
-            <a:off x="2788920" y="6565392"/>
+            <a:off x="2788919" y="6565392"/>
             <a:ext cx="1280160" cy="182880"/>
           </a:xfrm>
           <a:prstGeom prst="rect">
@@ -5279,7 +5279,7 @@
                 </a:solidFill>
                 <a:latin typeface="Calibri"/>
               </a:rPr>
-              <a:t>Current   0.50</a:t>
+              <a:t>Current  AED 14.08</a:t>
             </a:r>
           </a:p>
         </p:txBody>
@@ -6002,7 +6002,7 @@
                 </a:solidFill>
                 <a:latin typeface="Calibri"/>
               </a:rPr>
-              <a:t>Source: investing, marketscreener  |  Generated 13 May 2026  |  Analyst: Jabal Research</a:t>
+              <a:t>Source: investing, ishares, marketscreener  |  Generated 13 May 2026  |  Analyst: Jabal Research</a:t>
             </a:r>
           </a:p>
         </p:txBody>
@@ -6548,7 +6548,7 @@
                 </a:solidFill>
                 <a:latin typeface="Calibri"/>
               </a:rPr>
-              <a:t>Jabal maintains a constructive view into the upcoming print. the company sits in the — sector (—). The thesis hinges on three factors: demand trajectory through H2, feedstock/input-cost discipline, and management's tone on guidance during the call. We expect the print itself to be within consensus bounds; the read on forward commentary is the swing factor.</a:t>
+              <a:t>Jabal maintains a constructive view into the upcoming print. Abu Dhabi Commercial Bank P.J.S.C. sits in the Financials sector (Banks). Street consensus is buy (16 analysts covering); consensus target 17.73. The shares trade at a P/E around 7.2x trailing earnings. Macro context: local-economy GDP growth recently at 4.0%. The thesis hinges on three factors: demand trajectory through H2, feedstock/input-cost discipline, and management's tone on guidance during the call. We expect the print itself to be within consensus bounds; the read on forward commentary is the swing factor.</a:t>
             </a:r>
           </a:p>
         </p:txBody>
@@ -7772,7 +7772,7 @@
                 </a:solidFill>
                 <a:latin typeface="Calibri"/>
               </a:rPr>
-              <a:t>—</a:t>
+              <a:t>5.55%</a:t>
             </a:r>
           </a:p>
         </p:txBody>
@@ -7877,7 +7877,7 @@
                 </a:solidFill>
                 <a:latin typeface="Calibri"/>
               </a:rPr>
-              <a:t>Next print: Jul 16, 2026 (period 06/2026)  ·  Consensus: Investing</a:t>
+              <a:t>Next print: Jul 16, 2026 (period 06/2026)  ·  Consensus: Investing  ·  16 analysts covering</a:t>
             </a:r>
           </a:p>
         </p:txBody>
@@ -8963,7 +8963,7 @@
                 </a:solidFill>
                 <a:latin typeface="Calibri"/>
               </a:rPr>
-              <a:t>Source: investing, marketscreener  |  Generated 13 May 2026  |  Analyst: Jabal Research</a:t>
+              <a:t>Source: investing, ishares, marketscreener  |  Generated 13 May 2026  |  Analyst: Jabal Research</a:t>
             </a:r>
           </a:p>
         </p:txBody>
@@ -9419,7 +9419,7 @@
                 </a:solidFill>
                 <a:latin typeface="Calibri"/>
               </a:rPr>
-              <a:t>52-WEEK PRICE  ·  </a:t>
+              <a:t>52-WEEK PRICE  ·  AED</a:t>
             </a:r>
           </a:p>
         </p:txBody>
@@ -9502,36 +9502,1467 @@
         </p:nvSpPr>
         <p:spPr>
           <a:xfrm>
-            <a:off x="3520440" y="2779776"/>
-            <a:ext cx="2926079" cy="274320"/>
-          </a:xfrm>
-          <a:prstGeom prst="rect">
-            <a:avLst/>
-          </a:prstGeom>
-          <a:noFill/>
-        </p:spPr>
-        <p:txBody>
-          <a:bodyPr wrap="square" lIns="0" rIns="0" tIns="0" bIns="0" anchor="t">
-            <a:spAutoFit/>
-          </a:bodyPr>
+            <a:off x="3520440" y="2066543"/>
+            <a:ext cx="502920" cy="182880"/>
+          </a:xfrm>
+          <a:prstGeom prst="rect">
+            <a:avLst/>
+          </a:prstGeom>
+          <a:noFill/>
+        </p:spPr>
+        <p:txBody>
+          <a:bodyPr wrap="square" lIns="0" rIns="0" tIns="0" bIns="0" anchor="t">
+            <a:spAutoFit/>
+          </a:bodyPr>
+          <a:lstStyle/>
+          <a:p>
+            <a:pPr algn="l"/>
+            <a:r>
+              <a:rPr sz="1000" b="0">
+                <a:solidFill>
+                  <a:srgbClr val="1A1A1A"/>
+                </a:solidFill>
+                <a:latin typeface="Calibri"/>
+              </a:rPr>
+              <a:t>FY2021</a:t>
+            </a:r>
+          </a:p>
+        </p:txBody>
+      </p:sp>
+      <p:sp>
+        <p:nvSpPr>
+          <p:cNvPr id="14" name="Rectangle 13"/>
+          <p:cNvSpPr/>
+          <p:nvPr/>
+        </p:nvSpPr>
+        <p:spPr>
+          <a:xfrm>
+            <a:off x="4023360" y="2121408"/>
+            <a:ext cx="1801577" cy="73152"/>
+          </a:xfrm>
+          <a:prstGeom prst="rect">
+            <a:avLst/>
+          </a:prstGeom>
+          <a:solidFill>
+            <a:srgbClr val="EFE8DC"/>
+          </a:solidFill>
+          <a:ln>
+            <a:noFill/>
+          </a:ln>
+        </p:spPr>
+        <p:style>
+          <a:lnRef idx="1">
+            <a:schemeClr val="accent1"/>
+          </a:lnRef>
+          <a:fillRef idx="3">
+            <a:schemeClr val="accent1"/>
+          </a:fillRef>
+          <a:effectRef idx="2">
+            <a:schemeClr val="accent1"/>
+          </a:effectRef>
+          <a:fontRef idx="minor">
+            <a:schemeClr val="lt1"/>
+          </a:fontRef>
+        </p:style>
+        <p:txBody>
+          <a:bodyPr rtlCol="0" anchor="ctr"/>
           <a:lstStyle/>
           <a:p>
             <a:pPr algn="ctr"/>
+          </a:p>
+        </p:txBody>
+      </p:sp>
+      <p:sp>
+        <p:nvSpPr>
+          <p:cNvPr id="15" name="Oval 14"/>
+          <p:cNvSpPr/>
+          <p:nvPr/>
+        </p:nvSpPr>
+        <p:spPr>
+          <a:xfrm>
+            <a:off x="5779217" y="2103120"/>
+            <a:ext cx="91440" cy="109728"/>
+          </a:xfrm>
+          <a:prstGeom prst="ellipse">
+            <a:avLst/>
+          </a:prstGeom>
+          <a:solidFill>
+            <a:srgbClr val="7E6849"/>
+          </a:solidFill>
+          <a:ln>
+            <a:noFill/>
+          </a:ln>
+        </p:spPr>
+        <p:style>
+          <a:lnRef idx="1">
+            <a:schemeClr val="accent1"/>
+          </a:lnRef>
+          <a:fillRef idx="3">
+            <a:schemeClr val="accent1"/>
+          </a:fillRef>
+          <a:effectRef idx="2">
+            <a:schemeClr val="accent1"/>
+          </a:effectRef>
+          <a:fontRef idx="minor">
+            <a:schemeClr val="lt1"/>
+          </a:fontRef>
+        </p:style>
+        <p:txBody>
+          <a:bodyPr rtlCol="0" anchor="ctr"/>
+          <a:lstStyle/>
+          <a:p>
+            <a:pPr algn="ctr"/>
+          </a:p>
+        </p:txBody>
+      </p:sp>
+      <p:sp>
+        <p:nvSpPr>
+          <p:cNvPr id="16" name="TextBox 15"/>
+          <p:cNvSpPr txBox="1"/>
+          <p:nvPr/>
+        </p:nvSpPr>
+        <p:spPr>
+          <a:xfrm>
+            <a:off x="5870657" y="2084831"/>
+            <a:ext cx="411480" cy="182880"/>
+          </a:xfrm>
+          <a:prstGeom prst="rect">
+            <a:avLst/>
+          </a:prstGeom>
+          <a:noFill/>
+        </p:spPr>
+        <p:txBody>
+          <a:bodyPr wrap="square" lIns="0" rIns="0" tIns="0" bIns="0" anchor="t">
+            <a:spAutoFit/>
+          </a:bodyPr>
+          <a:lstStyle/>
+          <a:p>
+            <a:pPr algn="l"/>
             <a:r>
               <a:rPr sz="1000" b="0">
                 <a:solidFill>
+                  <a:srgbClr val="1A1A1A"/>
+                </a:solidFill>
+                <a:latin typeface="Calibri"/>
+              </a:rPr>
+              <a:t>11.7x</a:t>
+            </a:r>
+          </a:p>
+        </p:txBody>
+      </p:sp>
+      <p:sp>
+        <p:nvSpPr>
+          <p:cNvPr id="17" name="TextBox 16"/>
+          <p:cNvSpPr txBox="1"/>
+          <p:nvPr/>
+        </p:nvSpPr>
+        <p:spPr>
+          <a:xfrm>
+            <a:off x="3520440" y="2340863"/>
+            <a:ext cx="502920" cy="182880"/>
+          </a:xfrm>
+          <a:prstGeom prst="rect">
+            <a:avLst/>
+          </a:prstGeom>
+          <a:noFill/>
+        </p:spPr>
+        <p:txBody>
+          <a:bodyPr wrap="square" lIns="0" rIns="0" tIns="0" bIns="0" anchor="t">
+            <a:spAutoFit/>
+          </a:bodyPr>
+          <a:lstStyle/>
+          <a:p>
+            <a:pPr algn="l"/>
+            <a:r>
+              <a:rPr sz="1000" b="0">
+                <a:solidFill>
+                  <a:srgbClr val="1A1A1A"/>
+                </a:solidFill>
+                <a:latin typeface="Calibri"/>
+              </a:rPr>
+              <a:t>FY2022</a:t>
+            </a:r>
+          </a:p>
+        </p:txBody>
+      </p:sp>
+      <p:sp>
+        <p:nvSpPr>
+          <p:cNvPr id="18" name="Rectangle 17"/>
+          <p:cNvSpPr/>
+          <p:nvPr/>
+        </p:nvSpPr>
+        <p:spPr>
+          <a:xfrm>
+            <a:off x="4023360" y="2395727"/>
+            <a:ext cx="1288049" cy="73152"/>
+          </a:xfrm>
+          <a:prstGeom prst="rect">
+            <a:avLst/>
+          </a:prstGeom>
+          <a:solidFill>
+            <a:srgbClr val="EFE8DC"/>
+          </a:solidFill>
+          <a:ln>
+            <a:noFill/>
+          </a:ln>
+        </p:spPr>
+        <p:style>
+          <a:lnRef idx="1">
+            <a:schemeClr val="accent1"/>
+          </a:lnRef>
+          <a:fillRef idx="3">
+            <a:schemeClr val="accent1"/>
+          </a:fillRef>
+          <a:effectRef idx="2">
+            <a:schemeClr val="accent1"/>
+          </a:effectRef>
+          <a:fontRef idx="minor">
+            <a:schemeClr val="lt1"/>
+          </a:fontRef>
+        </p:style>
+        <p:txBody>
+          <a:bodyPr rtlCol="0" anchor="ctr"/>
+          <a:lstStyle/>
+          <a:p>
+            <a:pPr algn="ctr"/>
+          </a:p>
+        </p:txBody>
+      </p:sp>
+      <p:sp>
+        <p:nvSpPr>
+          <p:cNvPr id="19" name="Oval 18"/>
+          <p:cNvSpPr/>
+          <p:nvPr/>
+        </p:nvSpPr>
+        <p:spPr>
+          <a:xfrm>
+            <a:off x="5265689" y="2377439"/>
+            <a:ext cx="91440" cy="109728"/>
+          </a:xfrm>
+          <a:prstGeom prst="ellipse">
+            <a:avLst/>
+          </a:prstGeom>
+          <a:solidFill>
+            <a:srgbClr val="7E6849"/>
+          </a:solidFill>
+          <a:ln>
+            <a:noFill/>
+          </a:ln>
+        </p:spPr>
+        <p:style>
+          <a:lnRef idx="1">
+            <a:schemeClr val="accent1"/>
+          </a:lnRef>
+          <a:fillRef idx="3">
+            <a:schemeClr val="accent1"/>
+          </a:fillRef>
+          <a:effectRef idx="2">
+            <a:schemeClr val="accent1"/>
+          </a:effectRef>
+          <a:fontRef idx="minor">
+            <a:schemeClr val="lt1"/>
+          </a:fontRef>
+        </p:style>
+        <p:txBody>
+          <a:bodyPr rtlCol="0" anchor="ctr"/>
+          <a:lstStyle/>
+          <a:p>
+            <a:pPr algn="ctr"/>
+          </a:p>
+        </p:txBody>
+      </p:sp>
+      <p:sp>
+        <p:nvSpPr>
+          <p:cNvPr id="20" name="TextBox 19"/>
+          <p:cNvSpPr txBox="1"/>
+          <p:nvPr/>
+        </p:nvSpPr>
+        <p:spPr>
+          <a:xfrm>
+            <a:off x="5357129" y="2359151"/>
+            <a:ext cx="411480" cy="182880"/>
+          </a:xfrm>
+          <a:prstGeom prst="rect">
+            <a:avLst/>
+          </a:prstGeom>
+          <a:noFill/>
+        </p:spPr>
+        <p:txBody>
+          <a:bodyPr wrap="square" lIns="0" rIns="0" tIns="0" bIns="0" anchor="t">
+            <a:spAutoFit/>
+          </a:bodyPr>
+          <a:lstStyle/>
+          <a:p>
+            <a:pPr algn="l"/>
+            <a:r>
+              <a:rPr sz="1000" b="0">
+                <a:solidFill>
+                  <a:srgbClr val="1A1A1A"/>
+                </a:solidFill>
+                <a:latin typeface="Calibri"/>
+              </a:rPr>
+              <a:t>10.0x</a:t>
+            </a:r>
+          </a:p>
+        </p:txBody>
+      </p:sp>
+      <p:sp>
+        <p:nvSpPr>
+          <p:cNvPr id="21" name="TextBox 20"/>
+          <p:cNvSpPr txBox="1"/>
+          <p:nvPr/>
+        </p:nvSpPr>
+        <p:spPr>
+          <a:xfrm>
+            <a:off x="3520440" y="2615184"/>
+            <a:ext cx="502920" cy="182880"/>
+          </a:xfrm>
+          <a:prstGeom prst="rect">
+            <a:avLst/>
+          </a:prstGeom>
+          <a:noFill/>
+        </p:spPr>
+        <p:txBody>
+          <a:bodyPr wrap="square" lIns="0" rIns="0" tIns="0" bIns="0" anchor="t">
+            <a:spAutoFit/>
+          </a:bodyPr>
+          <a:lstStyle/>
+          <a:p>
+            <a:pPr algn="l"/>
+            <a:r>
+              <a:rPr sz="1000" b="0">
+                <a:solidFill>
+                  <a:srgbClr val="1A1A1A"/>
+                </a:solidFill>
+                <a:latin typeface="Calibri"/>
+              </a:rPr>
+              <a:t>FY2023</a:t>
+            </a:r>
+          </a:p>
+        </p:txBody>
+      </p:sp>
+      <p:sp>
+        <p:nvSpPr>
+          <p:cNvPr id="22" name="Rectangle 21"/>
+          <p:cNvSpPr/>
+          <p:nvPr/>
+        </p:nvSpPr>
+        <p:spPr>
+          <a:xfrm>
+            <a:off x="4023360" y="2670048"/>
+            <a:ext cx="859102" cy="73152"/>
+          </a:xfrm>
+          <a:prstGeom prst="rect">
+            <a:avLst/>
+          </a:prstGeom>
+          <a:solidFill>
+            <a:srgbClr val="EFE8DC"/>
+          </a:solidFill>
+          <a:ln>
+            <a:noFill/>
+          </a:ln>
+        </p:spPr>
+        <p:style>
+          <a:lnRef idx="1">
+            <a:schemeClr val="accent1"/>
+          </a:lnRef>
+          <a:fillRef idx="3">
+            <a:schemeClr val="accent1"/>
+          </a:fillRef>
+          <a:effectRef idx="2">
+            <a:schemeClr val="accent1"/>
+          </a:effectRef>
+          <a:fontRef idx="minor">
+            <a:schemeClr val="lt1"/>
+          </a:fontRef>
+        </p:style>
+        <p:txBody>
+          <a:bodyPr rtlCol="0" anchor="ctr"/>
+          <a:lstStyle/>
+          <a:p>
+            <a:pPr algn="ctr"/>
+          </a:p>
+        </p:txBody>
+      </p:sp>
+      <p:sp>
+        <p:nvSpPr>
+          <p:cNvPr id="23" name="Oval 22"/>
+          <p:cNvSpPr/>
+          <p:nvPr/>
+        </p:nvSpPr>
+        <p:spPr>
+          <a:xfrm>
+            <a:off x="4836742" y="2651760"/>
+            <a:ext cx="91440" cy="109728"/>
+          </a:xfrm>
+          <a:prstGeom prst="ellipse">
+            <a:avLst/>
+          </a:prstGeom>
+          <a:solidFill>
+            <a:srgbClr val="7E6849"/>
+          </a:solidFill>
+          <a:ln>
+            <a:noFill/>
+          </a:ln>
+        </p:spPr>
+        <p:style>
+          <a:lnRef idx="1">
+            <a:schemeClr val="accent1"/>
+          </a:lnRef>
+          <a:fillRef idx="3">
+            <a:schemeClr val="accent1"/>
+          </a:fillRef>
+          <a:effectRef idx="2">
+            <a:schemeClr val="accent1"/>
+          </a:effectRef>
+          <a:fontRef idx="minor">
+            <a:schemeClr val="lt1"/>
+          </a:fontRef>
+        </p:style>
+        <p:txBody>
+          <a:bodyPr rtlCol="0" anchor="ctr"/>
+          <a:lstStyle/>
+          <a:p>
+            <a:pPr algn="ctr"/>
+          </a:p>
+        </p:txBody>
+      </p:sp>
+      <p:sp>
+        <p:nvSpPr>
+          <p:cNvPr id="24" name="TextBox 23"/>
+          <p:cNvSpPr txBox="1"/>
+          <p:nvPr/>
+        </p:nvSpPr>
+        <p:spPr>
+          <a:xfrm>
+            <a:off x="4928182" y="2633472"/>
+            <a:ext cx="411480" cy="182880"/>
+          </a:xfrm>
+          <a:prstGeom prst="rect">
+            <a:avLst/>
+          </a:prstGeom>
+          <a:noFill/>
+        </p:spPr>
+        <p:txBody>
+          <a:bodyPr wrap="square" lIns="0" rIns="0" tIns="0" bIns="0" anchor="t">
+            <a:spAutoFit/>
+          </a:bodyPr>
+          <a:lstStyle/>
+          <a:p>
+            <a:pPr algn="l"/>
+            <a:r>
+              <a:rPr sz="1000" b="0">
+                <a:solidFill>
+                  <a:srgbClr val="1A1A1A"/>
+                </a:solidFill>
+                <a:latin typeface="Calibri"/>
+              </a:rPr>
+              <a:t>8.6x</a:t>
+            </a:r>
+          </a:p>
+        </p:txBody>
+      </p:sp>
+      <p:sp>
+        <p:nvSpPr>
+          <p:cNvPr id="25" name="TextBox 24"/>
+          <p:cNvSpPr txBox="1"/>
+          <p:nvPr/>
+        </p:nvSpPr>
+        <p:spPr>
+          <a:xfrm>
+            <a:off x="3520440" y="2889503"/>
+            <a:ext cx="502920" cy="182880"/>
+          </a:xfrm>
+          <a:prstGeom prst="rect">
+            <a:avLst/>
+          </a:prstGeom>
+          <a:noFill/>
+        </p:spPr>
+        <p:txBody>
+          <a:bodyPr wrap="square" lIns="0" rIns="0" tIns="0" bIns="0" anchor="t">
+            <a:spAutoFit/>
+          </a:bodyPr>
+          <a:lstStyle/>
+          <a:p>
+            <a:pPr algn="l"/>
+            <a:r>
+              <a:rPr sz="1000" b="0">
+                <a:solidFill>
+                  <a:srgbClr val="1A1A1A"/>
+                </a:solidFill>
+                <a:latin typeface="Calibri"/>
+              </a:rPr>
+              <a:t>FY2024</a:t>
+            </a:r>
+          </a:p>
+        </p:txBody>
+      </p:sp>
+      <p:sp>
+        <p:nvSpPr>
+          <p:cNvPr id="26" name="Rectangle 25"/>
+          <p:cNvSpPr/>
+          <p:nvPr/>
+        </p:nvSpPr>
+        <p:spPr>
+          <a:xfrm>
+            <a:off x="4023360" y="2944368"/>
+            <a:ext cx="913476" cy="73152"/>
+          </a:xfrm>
+          <a:prstGeom prst="rect">
+            <a:avLst/>
+          </a:prstGeom>
+          <a:solidFill>
+            <a:srgbClr val="EFE8DC"/>
+          </a:solidFill>
+          <a:ln>
+            <a:noFill/>
+          </a:ln>
+        </p:spPr>
+        <p:style>
+          <a:lnRef idx="1">
+            <a:schemeClr val="accent1"/>
+          </a:lnRef>
+          <a:fillRef idx="3">
+            <a:schemeClr val="accent1"/>
+          </a:fillRef>
+          <a:effectRef idx="2">
+            <a:schemeClr val="accent1"/>
+          </a:effectRef>
+          <a:fontRef idx="minor">
+            <a:schemeClr val="lt1"/>
+          </a:fontRef>
+        </p:style>
+        <p:txBody>
+          <a:bodyPr rtlCol="0" anchor="ctr"/>
+          <a:lstStyle/>
+          <a:p>
+            <a:pPr algn="ctr"/>
+          </a:p>
+        </p:txBody>
+      </p:sp>
+      <p:sp>
+        <p:nvSpPr>
+          <p:cNvPr id="27" name="Oval 26"/>
+          <p:cNvSpPr/>
+          <p:nvPr/>
+        </p:nvSpPr>
+        <p:spPr>
+          <a:xfrm>
+            <a:off x="4891116" y="2926079"/>
+            <a:ext cx="91440" cy="109728"/>
+          </a:xfrm>
+          <a:prstGeom prst="ellipse">
+            <a:avLst/>
+          </a:prstGeom>
+          <a:solidFill>
+            <a:srgbClr val="7E6849"/>
+          </a:solidFill>
+          <a:ln>
+            <a:noFill/>
+          </a:ln>
+        </p:spPr>
+        <p:style>
+          <a:lnRef idx="1">
+            <a:schemeClr val="accent1"/>
+          </a:lnRef>
+          <a:fillRef idx="3">
+            <a:schemeClr val="accent1"/>
+          </a:fillRef>
+          <a:effectRef idx="2">
+            <a:schemeClr val="accent1"/>
+          </a:effectRef>
+          <a:fontRef idx="minor">
+            <a:schemeClr val="lt1"/>
+          </a:fontRef>
+        </p:style>
+        <p:txBody>
+          <a:bodyPr rtlCol="0" anchor="ctr"/>
+          <a:lstStyle/>
+          <a:p>
+            <a:pPr algn="ctr"/>
+          </a:p>
+        </p:txBody>
+      </p:sp>
+      <p:sp>
+        <p:nvSpPr>
+          <p:cNvPr id="28" name="TextBox 27"/>
+          <p:cNvSpPr txBox="1"/>
+          <p:nvPr/>
+        </p:nvSpPr>
+        <p:spPr>
+          <a:xfrm>
+            <a:off x="4982556" y="2907791"/>
+            <a:ext cx="411480" cy="182880"/>
+          </a:xfrm>
+          <a:prstGeom prst="rect">
+            <a:avLst/>
+          </a:prstGeom>
+          <a:noFill/>
+        </p:spPr>
+        <p:txBody>
+          <a:bodyPr wrap="square" lIns="0" rIns="0" tIns="0" bIns="0" anchor="t">
+            <a:spAutoFit/>
+          </a:bodyPr>
+          <a:lstStyle/>
+          <a:p>
+            <a:pPr algn="l"/>
+            <a:r>
+              <a:rPr sz="1000" b="0">
+                <a:solidFill>
+                  <a:srgbClr val="1A1A1A"/>
+                </a:solidFill>
+                <a:latin typeface="Calibri"/>
+              </a:rPr>
+              <a:t>8.8x</a:t>
+            </a:r>
+          </a:p>
+        </p:txBody>
+      </p:sp>
+      <p:sp>
+        <p:nvSpPr>
+          <p:cNvPr id="29" name="TextBox 28"/>
+          <p:cNvSpPr txBox="1"/>
+          <p:nvPr/>
+        </p:nvSpPr>
+        <p:spPr>
+          <a:xfrm>
+            <a:off x="3520440" y="3163824"/>
+            <a:ext cx="502920" cy="182880"/>
+          </a:xfrm>
+          <a:prstGeom prst="rect">
+            <a:avLst/>
+          </a:prstGeom>
+          <a:noFill/>
+        </p:spPr>
+        <p:txBody>
+          <a:bodyPr wrap="square" lIns="0" rIns="0" tIns="0" bIns="0" anchor="t">
+            <a:spAutoFit/>
+          </a:bodyPr>
+          <a:lstStyle/>
+          <a:p>
+            <a:pPr algn="l"/>
+            <a:r>
+              <a:rPr sz="1000" b="0">
+                <a:solidFill>
+                  <a:srgbClr val="1A1A1A"/>
+                </a:solidFill>
+                <a:latin typeface="Calibri"/>
+              </a:rPr>
+              <a:t>FY2025</a:t>
+            </a:r>
+          </a:p>
+        </p:txBody>
+      </p:sp>
+      <p:sp>
+        <p:nvSpPr>
+          <p:cNvPr id="30" name="Rectangle 29"/>
+          <p:cNvSpPr/>
+          <p:nvPr/>
+        </p:nvSpPr>
+        <p:spPr>
+          <a:xfrm>
+            <a:off x="4023360" y="3218688"/>
+            <a:ext cx="1266904" cy="73152"/>
+          </a:xfrm>
+          <a:prstGeom prst="rect">
+            <a:avLst/>
+          </a:prstGeom>
+          <a:solidFill>
+            <a:srgbClr val="EFE8DC"/>
+          </a:solidFill>
+          <a:ln>
+            <a:noFill/>
+          </a:ln>
+        </p:spPr>
+        <p:style>
+          <a:lnRef idx="1">
+            <a:schemeClr val="accent1"/>
+          </a:lnRef>
+          <a:fillRef idx="3">
+            <a:schemeClr val="accent1"/>
+          </a:fillRef>
+          <a:effectRef idx="2">
+            <a:schemeClr val="accent1"/>
+          </a:effectRef>
+          <a:fontRef idx="minor">
+            <a:schemeClr val="lt1"/>
+          </a:fontRef>
+        </p:style>
+        <p:txBody>
+          <a:bodyPr rtlCol="0" anchor="ctr"/>
+          <a:lstStyle/>
+          <a:p>
+            <a:pPr algn="ctr"/>
+          </a:p>
+        </p:txBody>
+      </p:sp>
+      <p:sp>
+        <p:nvSpPr>
+          <p:cNvPr id="31" name="Oval 30"/>
+          <p:cNvSpPr/>
+          <p:nvPr/>
+        </p:nvSpPr>
+        <p:spPr>
+          <a:xfrm>
+            <a:off x="5244544" y="3200400"/>
+            <a:ext cx="91440" cy="109728"/>
+          </a:xfrm>
+          <a:prstGeom prst="ellipse">
+            <a:avLst/>
+          </a:prstGeom>
+          <a:solidFill>
+            <a:srgbClr val="7E6849"/>
+          </a:solidFill>
+          <a:ln>
+            <a:noFill/>
+          </a:ln>
+        </p:spPr>
+        <p:style>
+          <a:lnRef idx="1">
+            <a:schemeClr val="accent1"/>
+          </a:lnRef>
+          <a:fillRef idx="3">
+            <a:schemeClr val="accent1"/>
+          </a:fillRef>
+          <a:effectRef idx="2">
+            <a:schemeClr val="accent1"/>
+          </a:effectRef>
+          <a:fontRef idx="minor">
+            <a:schemeClr val="lt1"/>
+          </a:fontRef>
+        </p:style>
+        <p:txBody>
+          <a:bodyPr rtlCol="0" anchor="ctr"/>
+          <a:lstStyle/>
+          <a:p>
+            <a:pPr algn="ctr"/>
+          </a:p>
+        </p:txBody>
+      </p:sp>
+      <p:sp>
+        <p:nvSpPr>
+          <p:cNvPr id="32" name="TextBox 31"/>
+          <p:cNvSpPr txBox="1"/>
+          <p:nvPr/>
+        </p:nvSpPr>
+        <p:spPr>
+          <a:xfrm>
+            <a:off x="5335984" y="3182112"/>
+            <a:ext cx="411480" cy="182880"/>
+          </a:xfrm>
+          <a:prstGeom prst="rect">
+            <a:avLst/>
+          </a:prstGeom>
+          <a:noFill/>
+        </p:spPr>
+        <p:txBody>
+          <a:bodyPr wrap="square" lIns="0" rIns="0" tIns="0" bIns="0" anchor="t">
+            <a:spAutoFit/>
+          </a:bodyPr>
+          <a:lstStyle/>
+          <a:p>
+            <a:pPr algn="l"/>
+            <a:r>
+              <a:rPr sz="1000" b="0">
+                <a:solidFill>
+                  <a:srgbClr val="1A1A1A"/>
+                </a:solidFill>
+                <a:latin typeface="Calibri"/>
+              </a:rPr>
+              <a:t>9.9x</a:t>
+            </a:r>
+          </a:p>
+        </p:txBody>
+      </p:sp>
+      <p:sp>
+        <p:nvSpPr>
+          <p:cNvPr id="33" name="TextBox 32"/>
+          <p:cNvSpPr txBox="1"/>
+          <p:nvPr/>
+        </p:nvSpPr>
+        <p:spPr>
+          <a:xfrm>
+            <a:off x="3520440" y="3438144"/>
+            <a:ext cx="502920" cy="182880"/>
+          </a:xfrm>
+          <a:prstGeom prst="rect">
+            <a:avLst/>
+          </a:prstGeom>
+          <a:noFill/>
+        </p:spPr>
+        <p:txBody>
+          <a:bodyPr wrap="square" lIns="0" rIns="0" tIns="0" bIns="0" anchor="t">
+            <a:spAutoFit/>
+          </a:bodyPr>
+          <a:lstStyle/>
+          <a:p>
+            <a:pPr algn="l"/>
+            <a:r>
+              <a:rPr sz="1000" b="0">
+                <a:solidFill>
+                  <a:srgbClr val="1A1A1A"/>
+                </a:solidFill>
+                <a:latin typeface="Calibri"/>
+              </a:rPr>
+              <a:t>FY2026</a:t>
+            </a:r>
+          </a:p>
+        </p:txBody>
+      </p:sp>
+      <p:sp>
+        <p:nvSpPr>
+          <p:cNvPr id="34" name="Rectangle 33"/>
+          <p:cNvSpPr/>
+          <p:nvPr/>
+        </p:nvSpPr>
+        <p:spPr>
+          <a:xfrm>
+            <a:off x="4023360" y="3493008"/>
+            <a:ext cx="1073575" cy="73152"/>
+          </a:xfrm>
+          <a:prstGeom prst="rect">
+            <a:avLst/>
+          </a:prstGeom>
+          <a:solidFill>
+            <a:srgbClr val="EFE8DC"/>
+          </a:solidFill>
+          <a:ln>
+            <a:noFill/>
+          </a:ln>
+        </p:spPr>
+        <p:style>
+          <a:lnRef idx="1">
+            <a:schemeClr val="accent1"/>
+          </a:lnRef>
+          <a:fillRef idx="3">
+            <a:schemeClr val="accent1"/>
+          </a:fillRef>
+          <a:effectRef idx="2">
+            <a:schemeClr val="accent1"/>
+          </a:effectRef>
+          <a:fontRef idx="minor">
+            <a:schemeClr val="lt1"/>
+          </a:fontRef>
+        </p:style>
+        <p:txBody>
+          <a:bodyPr rtlCol="0" anchor="ctr"/>
+          <a:lstStyle/>
+          <a:p>
+            <a:pPr algn="ctr"/>
+          </a:p>
+        </p:txBody>
+      </p:sp>
+      <p:sp>
+        <p:nvSpPr>
+          <p:cNvPr id="35" name="Oval 34"/>
+          <p:cNvSpPr/>
+          <p:nvPr/>
+        </p:nvSpPr>
+        <p:spPr>
+          <a:xfrm>
+            <a:off x="5051215" y="3474720"/>
+            <a:ext cx="91440" cy="109728"/>
+          </a:xfrm>
+          <a:prstGeom prst="ellipse">
+            <a:avLst/>
+          </a:prstGeom>
+          <a:solidFill>
+            <a:srgbClr val="7E6849"/>
+          </a:solidFill>
+          <a:ln>
+            <a:noFill/>
+          </a:ln>
+        </p:spPr>
+        <p:style>
+          <a:lnRef idx="1">
+            <a:schemeClr val="accent1"/>
+          </a:lnRef>
+          <a:fillRef idx="3">
+            <a:schemeClr val="accent1"/>
+          </a:fillRef>
+          <a:effectRef idx="2">
+            <a:schemeClr val="accent1"/>
+          </a:effectRef>
+          <a:fontRef idx="minor">
+            <a:schemeClr val="lt1"/>
+          </a:fontRef>
+        </p:style>
+        <p:txBody>
+          <a:bodyPr rtlCol="0" anchor="ctr"/>
+          <a:lstStyle/>
+          <a:p>
+            <a:pPr algn="ctr"/>
+          </a:p>
+        </p:txBody>
+      </p:sp>
+      <p:sp>
+        <p:nvSpPr>
+          <p:cNvPr id="36" name="TextBox 35"/>
+          <p:cNvSpPr txBox="1"/>
+          <p:nvPr/>
+        </p:nvSpPr>
+        <p:spPr>
+          <a:xfrm>
+            <a:off x="5142655" y="3456432"/>
+            <a:ext cx="411480" cy="182880"/>
+          </a:xfrm>
+          <a:prstGeom prst="rect">
+            <a:avLst/>
+          </a:prstGeom>
+          <a:noFill/>
+        </p:spPr>
+        <p:txBody>
+          <a:bodyPr wrap="square" lIns="0" rIns="0" tIns="0" bIns="0" anchor="t">
+            <a:spAutoFit/>
+          </a:bodyPr>
+          <a:lstStyle/>
+          <a:p>
+            <a:pPr algn="l"/>
+            <a:r>
+              <a:rPr sz="1000" b="0">
+                <a:solidFill>
+                  <a:srgbClr val="1A1A1A"/>
+                </a:solidFill>
+                <a:latin typeface="Calibri"/>
+              </a:rPr>
+              <a:t>9.3x</a:t>
+            </a:r>
+          </a:p>
+        </p:txBody>
+      </p:sp>
+      <p:sp>
+        <p:nvSpPr>
+          <p:cNvPr id="37" name="TextBox 36"/>
+          <p:cNvSpPr txBox="1"/>
+          <p:nvPr/>
+        </p:nvSpPr>
+        <p:spPr>
+          <a:xfrm>
+            <a:off x="3520440" y="3712463"/>
+            <a:ext cx="502920" cy="182880"/>
+          </a:xfrm>
+          <a:prstGeom prst="rect">
+            <a:avLst/>
+          </a:prstGeom>
+          <a:noFill/>
+        </p:spPr>
+        <p:txBody>
+          <a:bodyPr wrap="square" lIns="0" rIns="0" tIns="0" bIns="0" anchor="t">
+            <a:spAutoFit/>
+          </a:bodyPr>
+          <a:lstStyle/>
+          <a:p>
+            <a:pPr algn="l"/>
+            <a:r>
+              <a:rPr sz="1000" b="0">
+                <a:solidFill>
+                  <a:srgbClr val="1A1A1A"/>
+                </a:solidFill>
+                <a:latin typeface="Calibri"/>
+              </a:rPr>
+              <a:t>FY2027</a:t>
+            </a:r>
+          </a:p>
+        </p:txBody>
+      </p:sp>
+      <p:sp>
+        <p:nvSpPr>
+          <p:cNvPr id="38" name="Rectangle 37"/>
+          <p:cNvSpPr/>
+          <p:nvPr/>
+        </p:nvSpPr>
+        <p:spPr>
+          <a:xfrm>
+            <a:off x="4023360" y="3767327"/>
+            <a:ext cx="732230" cy="73152"/>
+          </a:xfrm>
+          <a:prstGeom prst="rect">
+            <a:avLst/>
+          </a:prstGeom>
+          <a:solidFill>
+            <a:srgbClr val="EFE8DC"/>
+          </a:solidFill>
+          <a:ln>
+            <a:noFill/>
+          </a:ln>
+        </p:spPr>
+        <p:style>
+          <a:lnRef idx="1">
+            <a:schemeClr val="accent1"/>
+          </a:lnRef>
+          <a:fillRef idx="3">
+            <a:schemeClr val="accent1"/>
+          </a:fillRef>
+          <a:effectRef idx="2">
+            <a:schemeClr val="accent1"/>
+          </a:effectRef>
+          <a:fontRef idx="minor">
+            <a:schemeClr val="lt1"/>
+          </a:fontRef>
+        </p:style>
+        <p:txBody>
+          <a:bodyPr rtlCol="0" anchor="ctr"/>
+          <a:lstStyle/>
+          <a:p>
+            <a:pPr algn="ctr"/>
+          </a:p>
+        </p:txBody>
+      </p:sp>
+      <p:sp>
+        <p:nvSpPr>
+          <p:cNvPr id="39" name="Oval 38"/>
+          <p:cNvSpPr/>
+          <p:nvPr/>
+        </p:nvSpPr>
+        <p:spPr>
+          <a:xfrm>
+            <a:off x="4709870" y="3749039"/>
+            <a:ext cx="91440" cy="109728"/>
+          </a:xfrm>
+          <a:prstGeom prst="ellipse">
+            <a:avLst/>
+          </a:prstGeom>
+          <a:solidFill>
+            <a:srgbClr val="7E6849"/>
+          </a:solidFill>
+          <a:ln>
+            <a:noFill/>
+          </a:ln>
+        </p:spPr>
+        <p:style>
+          <a:lnRef idx="1">
+            <a:schemeClr val="accent1"/>
+          </a:lnRef>
+          <a:fillRef idx="3">
+            <a:schemeClr val="accent1"/>
+          </a:fillRef>
+          <a:effectRef idx="2">
+            <a:schemeClr val="accent1"/>
+          </a:effectRef>
+          <a:fontRef idx="minor">
+            <a:schemeClr val="lt1"/>
+          </a:fontRef>
+        </p:style>
+        <p:txBody>
+          <a:bodyPr rtlCol="0" anchor="ctr"/>
+          <a:lstStyle/>
+          <a:p>
+            <a:pPr algn="ctr"/>
+          </a:p>
+        </p:txBody>
+      </p:sp>
+      <p:sp>
+        <p:nvSpPr>
+          <p:cNvPr id="40" name="TextBox 39"/>
+          <p:cNvSpPr txBox="1"/>
+          <p:nvPr/>
+        </p:nvSpPr>
+        <p:spPr>
+          <a:xfrm>
+            <a:off x="4801310" y="3730751"/>
+            <a:ext cx="411480" cy="182880"/>
+          </a:xfrm>
+          <a:prstGeom prst="rect">
+            <a:avLst/>
+          </a:prstGeom>
+          <a:noFill/>
+        </p:spPr>
+        <p:txBody>
+          <a:bodyPr wrap="square" lIns="0" rIns="0" tIns="0" bIns="0" anchor="t">
+            <a:spAutoFit/>
+          </a:bodyPr>
+          <a:lstStyle/>
+          <a:p>
+            <a:pPr algn="l"/>
+            <a:r>
+              <a:rPr sz="1000" b="0">
+                <a:solidFill>
+                  <a:srgbClr val="1A1A1A"/>
+                </a:solidFill>
+                <a:latin typeface="Calibri"/>
+              </a:rPr>
+              <a:t>8.2x</a:t>
+            </a:r>
+          </a:p>
+        </p:txBody>
+      </p:sp>
+      <p:sp>
+        <p:nvSpPr>
+          <p:cNvPr id="41" name="TextBox 40"/>
+          <p:cNvSpPr txBox="1"/>
+          <p:nvPr/>
+        </p:nvSpPr>
+        <p:spPr>
+          <a:xfrm>
+            <a:off x="3520440" y="3986783"/>
+            <a:ext cx="502920" cy="182880"/>
+          </a:xfrm>
+          <a:prstGeom prst="rect">
+            <a:avLst/>
+          </a:prstGeom>
+          <a:noFill/>
+        </p:spPr>
+        <p:txBody>
+          <a:bodyPr wrap="square" lIns="0" rIns="0" tIns="0" bIns="0" anchor="t">
+            <a:spAutoFit/>
+          </a:bodyPr>
+          <a:lstStyle/>
+          <a:p>
+            <a:pPr algn="l"/>
+            <a:r>
+              <a:rPr sz="1000" b="0">
+                <a:solidFill>
+                  <a:srgbClr val="1A1A1A"/>
+                </a:solidFill>
+                <a:latin typeface="Calibri"/>
+              </a:rPr>
+              <a:t>FY2028</a:t>
+            </a:r>
+          </a:p>
+        </p:txBody>
+      </p:sp>
+      <p:sp>
+        <p:nvSpPr>
+          <p:cNvPr id="42" name="Rectangle 41"/>
+          <p:cNvSpPr/>
+          <p:nvPr/>
+        </p:nvSpPr>
+        <p:spPr>
+          <a:xfrm>
+            <a:off x="4023360" y="4041647"/>
+            <a:ext cx="433176" cy="73152"/>
+          </a:xfrm>
+          <a:prstGeom prst="rect">
+            <a:avLst/>
+          </a:prstGeom>
+          <a:solidFill>
+            <a:srgbClr val="EFE8DC"/>
+          </a:solidFill>
+          <a:ln>
+            <a:noFill/>
+          </a:ln>
+        </p:spPr>
+        <p:style>
+          <a:lnRef idx="1">
+            <a:schemeClr val="accent1"/>
+          </a:lnRef>
+          <a:fillRef idx="3">
+            <a:schemeClr val="accent1"/>
+          </a:fillRef>
+          <a:effectRef idx="2">
+            <a:schemeClr val="accent1"/>
+          </a:effectRef>
+          <a:fontRef idx="minor">
+            <a:schemeClr val="lt1"/>
+          </a:fontRef>
+        </p:style>
+        <p:txBody>
+          <a:bodyPr rtlCol="0" anchor="ctr"/>
+          <a:lstStyle/>
+          <a:p>
+            <a:pPr algn="ctr"/>
+          </a:p>
+        </p:txBody>
+      </p:sp>
+      <p:sp>
+        <p:nvSpPr>
+          <p:cNvPr id="43" name="Oval 42"/>
+          <p:cNvSpPr/>
+          <p:nvPr/>
+        </p:nvSpPr>
+        <p:spPr>
+          <a:xfrm>
+            <a:off x="4410816" y="4023359"/>
+            <a:ext cx="91440" cy="109728"/>
+          </a:xfrm>
+          <a:prstGeom prst="ellipse">
+            <a:avLst/>
+          </a:prstGeom>
+          <a:solidFill>
+            <a:srgbClr val="7E6849"/>
+          </a:solidFill>
+          <a:ln>
+            <a:noFill/>
+          </a:ln>
+        </p:spPr>
+        <p:style>
+          <a:lnRef idx="1">
+            <a:schemeClr val="accent1"/>
+          </a:lnRef>
+          <a:fillRef idx="3">
+            <a:schemeClr val="accent1"/>
+          </a:fillRef>
+          <a:effectRef idx="2">
+            <a:schemeClr val="accent1"/>
+          </a:effectRef>
+          <a:fontRef idx="minor">
+            <a:schemeClr val="lt1"/>
+          </a:fontRef>
+        </p:style>
+        <p:txBody>
+          <a:bodyPr rtlCol="0" anchor="ctr"/>
+          <a:lstStyle/>
+          <a:p>
+            <a:pPr algn="ctr"/>
+          </a:p>
+        </p:txBody>
+      </p:sp>
+      <p:sp>
+        <p:nvSpPr>
+          <p:cNvPr id="44" name="TextBox 43"/>
+          <p:cNvSpPr txBox="1"/>
+          <p:nvPr/>
+        </p:nvSpPr>
+        <p:spPr>
+          <a:xfrm>
+            <a:off x="4502256" y="4005071"/>
+            <a:ext cx="411480" cy="182880"/>
+          </a:xfrm>
+          <a:prstGeom prst="rect">
+            <a:avLst/>
+          </a:prstGeom>
+          <a:noFill/>
+        </p:spPr>
+        <p:txBody>
+          <a:bodyPr wrap="square" lIns="0" rIns="0" tIns="0" bIns="0" anchor="t">
+            <a:spAutoFit/>
+          </a:bodyPr>
+          <a:lstStyle/>
+          <a:p>
+            <a:pPr algn="l"/>
+            <a:r>
+              <a:rPr sz="1000" b="0">
+                <a:solidFill>
+                  <a:srgbClr val="1A1A1A"/>
+                </a:solidFill>
+                <a:latin typeface="Calibri"/>
+              </a:rPr>
+              <a:t>7.2x</a:t>
+            </a:r>
+          </a:p>
+        </p:txBody>
+      </p:sp>
+      <p:sp>
+        <p:nvSpPr>
+          <p:cNvPr id="45" name="TextBox 44"/>
+          <p:cNvSpPr txBox="1"/>
+          <p:nvPr/>
+        </p:nvSpPr>
+        <p:spPr>
+          <a:xfrm>
+            <a:off x="3886200" y="4297680"/>
+            <a:ext cx="365760" cy="164592"/>
+          </a:xfrm>
+          <a:prstGeom prst="rect">
+            <a:avLst/>
+          </a:prstGeom>
+          <a:noFill/>
+        </p:spPr>
+        <p:txBody>
+          <a:bodyPr wrap="square" lIns="0" rIns="0" tIns="0" bIns="0" anchor="t">
+            <a:spAutoFit/>
+          </a:bodyPr>
+          <a:lstStyle/>
+          <a:p>
+            <a:pPr algn="l"/>
+            <a:r>
+              <a:rPr sz="700" b="0">
+                <a:solidFill>
                   <a:srgbClr val="9A9A9A"/>
                 </a:solidFill>
                 <a:latin typeface="Calibri"/>
               </a:rPr>
-              <a:t>No P/E history available</a:t>
-            </a:r>
-          </a:p>
-        </p:txBody>
-      </p:sp>
-      <p:sp>
-        <p:nvSpPr>
-          <p:cNvPr id="14" name="Rectangle 13"/>
+              <a:t>6x</a:t>
+            </a:r>
+          </a:p>
+        </p:txBody>
+      </p:sp>
+      <p:sp>
+        <p:nvSpPr>
+          <p:cNvPr id="46" name="TextBox 45"/>
+          <p:cNvSpPr txBox="1"/>
+          <p:nvPr/>
+        </p:nvSpPr>
+        <p:spPr>
+          <a:xfrm>
+            <a:off x="4663440" y="4297680"/>
+            <a:ext cx="365760" cy="164592"/>
+          </a:xfrm>
+          <a:prstGeom prst="rect">
+            <a:avLst/>
+          </a:prstGeom>
+          <a:noFill/>
+        </p:spPr>
+        <p:txBody>
+          <a:bodyPr wrap="square" lIns="0" rIns="0" tIns="0" bIns="0" anchor="t">
+            <a:spAutoFit/>
+          </a:bodyPr>
+          <a:lstStyle/>
+          <a:p>
+            <a:pPr algn="l"/>
+            <a:r>
+              <a:rPr sz="700" b="0">
+                <a:solidFill>
+                  <a:srgbClr val="9A9A9A"/>
+                </a:solidFill>
+                <a:latin typeface="Calibri"/>
+              </a:rPr>
+              <a:t>8x</a:t>
+            </a:r>
+          </a:p>
+        </p:txBody>
+      </p:sp>
+      <p:sp>
+        <p:nvSpPr>
+          <p:cNvPr id="47" name="TextBox 46"/>
+          <p:cNvSpPr txBox="1"/>
+          <p:nvPr/>
+        </p:nvSpPr>
+        <p:spPr>
+          <a:xfrm>
+            <a:off x="5440679" y="4297680"/>
+            <a:ext cx="365760" cy="164592"/>
+          </a:xfrm>
+          <a:prstGeom prst="rect">
+            <a:avLst/>
+          </a:prstGeom>
+          <a:noFill/>
+        </p:spPr>
+        <p:txBody>
+          <a:bodyPr wrap="square" lIns="0" rIns="0" tIns="0" bIns="0" anchor="t">
+            <a:spAutoFit/>
+          </a:bodyPr>
+          <a:lstStyle/>
+          <a:p>
+            <a:pPr algn="l"/>
+            <a:r>
+              <a:rPr sz="700" b="0">
+                <a:solidFill>
+                  <a:srgbClr val="9A9A9A"/>
+                </a:solidFill>
+                <a:latin typeface="Calibri"/>
+              </a:rPr>
+              <a:t>11x</a:t>
+            </a:r>
+          </a:p>
+        </p:txBody>
+      </p:sp>
+      <p:sp>
+        <p:nvSpPr>
+          <p:cNvPr id="48" name="TextBox 47"/>
+          <p:cNvSpPr txBox="1"/>
+          <p:nvPr/>
+        </p:nvSpPr>
+        <p:spPr>
+          <a:xfrm>
+            <a:off x="6217920" y="4297680"/>
+            <a:ext cx="365760" cy="164592"/>
+          </a:xfrm>
+          <a:prstGeom prst="rect">
+            <a:avLst/>
+          </a:prstGeom>
+          <a:noFill/>
+        </p:spPr>
+        <p:txBody>
+          <a:bodyPr wrap="square" lIns="0" rIns="0" tIns="0" bIns="0" anchor="t">
+            <a:spAutoFit/>
+          </a:bodyPr>
+          <a:lstStyle/>
+          <a:p>
+            <a:pPr algn="l"/>
+            <a:r>
+              <a:rPr sz="700" b="0">
+                <a:solidFill>
+                  <a:srgbClr val="9A9A9A"/>
+                </a:solidFill>
+                <a:latin typeface="Calibri"/>
+              </a:rPr>
+              <a:t>13x</a:t>
+            </a:r>
+          </a:p>
+        </p:txBody>
+      </p:sp>
+      <p:sp>
+        <p:nvSpPr>
+          <p:cNvPr id="49" name="Diamond 48"/>
+          <p:cNvSpPr/>
+          <p:nvPr/>
+        </p:nvSpPr>
+        <p:spPr>
+          <a:xfrm>
+            <a:off x="4383384" y="4242816"/>
+            <a:ext cx="146304" cy="146304"/>
+          </a:xfrm>
+          <a:prstGeom prst="diamond">
+            <a:avLst/>
+          </a:prstGeom>
+          <a:solidFill>
+            <a:srgbClr val="1A1A1A"/>
+          </a:solidFill>
+          <a:ln>
+            <a:noFill/>
+          </a:ln>
+        </p:spPr>
+        <p:style>
+          <a:lnRef idx="1">
+            <a:schemeClr val="accent1"/>
+          </a:lnRef>
+          <a:fillRef idx="3">
+            <a:schemeClr val="accent1"/>
+          </a:fillRef>
+          <a:effectRef idx="2">
+            <a:schemeClr val="accent1"/>
+          </a:effectRef>
+          <a:fontRef idx="minor">
+            <a:schemeClr val="lt1"/>
+          </a:fontRef>
+        </p:style>
+        <p:txBody>
+          <a:bodyPr rtlCol="0" anchor="ctr"/>
+          <a:lstStyle/>
+          <a:p>
+            <a:pPr algn="ctr"/>
+          </a:p>
+        </p:txBody>
+      </p:sp>
+      <p:sp>
+        <p:nvSpPr>
+          <p:cNvPr id="50" name="TextBox 49"/>
+          <p:cNvSpPr txBox="1"/>
+          <p:nvPr/>
+        </p:nvSpPr>
+        <p:spPr>
+          <a:xfrm>
+            <a:off x="4547976" y="4224528"/>
+            <a:ext cx="1280160" cy="164592"/>
+          </a:xfrm>
+          <a:prstGeom prst="rect">
+            <a:avLst/>
+          </a:prstGeom>
+          <a:noFill/>
+        </p:spPr>
+        <p:txBody>
+          <a:bodyPr wrap="square" lIns="0" rIns="0" tIns="0" bIns="0" anchor="t">
+            <a:spAutoFit/>
+          </a:bodyPr>
+          <a:lstStyle/>
+          <a:p>
+            <a:pPr algn="l"/>
+            <a:r>
+              <a:rPr sz="700" b="0">
+                <a:solidFill>
+                  <a:srgbClr val="1A1A1A"/>
+                </a:solidFill>
+                <a:latin typeface="Calibri"/>
+              </a:rPr>
+              <a:t>Current  (7.2x)</a:t>
+            </a:r>
+          </a:p>
+        </p:txBody>
+      </p:sp>
+      <p:sp>
+        <p:nvSpPr>
+          <p:cNvPr id="51" name="Rectangle 50"/>
           <p:cNvSpPr/>
           <p:nvPr/>
         </p:nvSpPr>
@@ -9575,7 +11006,7 @@
       </p:sp>
       <p:sp>
         <p:nvSpPr>
-          <p:cNvPr id="15" name="TextBox 14"/>
+          <p:cNvPr id="52" name="TextBox 51"/>
           <p:cNvSpPr txBox="1"/>
           <p:nvPr/>
         </p:nvSpPr>
@@ -9610,7 +11041,7 @@
       </p:sp>
       <p:sp>
         <p:nvSpPr>
-          <p:cNvPr id="16" name="TextBox 15"/>
+          <p:cNvPr id="53" name="TextBox 52"/>
           <p:cNvSpPr txBox="1"/>
           <p:nvPr/>
         </p:nvSpPr>
@@ -9645,7 +11076,7 @@
       </p:sp>
       <p:sp>
         <p:nvSpPr>
-          <p:cNvPr id="17" name="TextBox 16"/>
+          <p:cNvPr id="54" name="TextBox 53"/>
           <p:cNvSpPr txBox="1"/>
           <p:nvPr/>
         </p:nvSpPr>
@@ -9680,7 +11111,7 @@
       </p:sp>
       <p:sp>
         <p:nvSpPr>
-          <p:cNvPr id="18" name="TextBox 17"/>
+          <p:cNvPr id="55" name="TextBox 54"/>
           <p:cNvSpPr txBox="1"/>
           <p:nvPr/>
         </p:nvSpPr>
@@ -9715,7 +11146,7 @@
       </p:sp>
       <p:sp>
         <p:nvSpPr>
-          <p:cNvPr id="19" name="TextBox 18"/>
+          <p:cNvPr id="56" name="TextBox 55"/>
           <p:cNvSpPr txBox="1"/>
           <p:nvPr/>
         </p:nvSpPr>
@@ -9750,7 +11181,7 @@
       </p:sp>
       <p:sp>
         <p:nvSpPr>
-          <p:cNvPr id="20" name="TextBox 19"/>
+          <p:cNvPr id="57" name="TextBox 56"/>
           <p:cNvSpPr txBox="1"/>
           <p:nvPr/>
         </p:nvSpPr>
@@ -9785,7 +11216,7 @@
       </p:sp>
       <p:sp>
         <p:nvSpPr>
-          <p:cNvPr id="21" name="TextBox 20"/>
+          <p:cNvPr id="58" name="TextBox 57"/>
           <p:cNvSpPr txBox="1"/>
           <p:nvPr/>
         </p:nvSpPr>
@@ -9820,7 +11251,7 @@
       </p:sp>
       <p:sp>
         <p:nvSpPr>
-          <p:cNvPr id="22" name="Rectangle 21"/>
+          <p:cNvPr id="59" name="Rectangle 58"/>
           <p:cNvSpPr/>
           <p:nvPr/>
         </p:nvSpPr>
@@ -9864,7 +11295,217 @@
       </p:sp>
       <p:sp>
         <p:nvSpPr>
-          <p:cNvPr id="23" name="Rectangle 22"/>
+          <p:cNvPr id="60" name="TextBox 59"/>
+          <p:cNvSpPr txBox="1"/>
+          <p:nvPr/>
+        </p:nvSpPr>
+        <p:spPr>
+          <a:xfrm>
+            <a:off x="411480" y="5093208"/>
+            <a:ext cx="1874520" cy="256032"/>
+          </a:xfrm>
+          <a:prstGeom prst="rect">
+            <a:avLst/>
+          </a:prstGeom>
+          <a:noFill/>
+        </p:spPr>
+        <p:txBody>
+          <a:bodyPr wrap="square" lIns="0" rIns="0" tIns="0" bIns="0" anchor="t">
+            <a:spAutoFit/>
+          </a:bodyPr>
+          <a:lstStyle/>
+          <a:p>
+            <a:pPr algn="l"/>
+            <a:r>
+              <a:rPr sz="1000" b="0">
+                <a:solidFill>
+                  <a:srgbClr val="1A1A1A"/>
+                </a:solidFill>
+                <a:latin typeface="Calibri"/>
+              </a:rPr>
+              <a:t>iShares MSCI UAE ETF</a:t>
+            </a:r>
+          </a:p>
+        </p:txBody>
+      </p:sp>
+      <p:sp>
+        <p:nvSpPr>
+          <p:cNvPr id="61" name="TextBox 60"/>
+          <p:cNvSpPr txBox="1"/>
+          <p:nvPr/>
+        </p:nvSpPr>
+        <p:spPr>
+          <a:xfrm>
+            <a:off x="2331720" y="5093208"/>
+            <a:ext cx="960120" cy="256032"/>
+          </a:xfrm>
+          <a:prstGeom prst="rect">
+            <a:avLst/>
+          </a:prstGeom>
+          <a:noFill/>
+        </p:spPr>
+        <p:txBody>
+          <a:bodyPr wrap="square" lIns="0" rIns="0" tIns="0" bIns="0" anchor="t">
+            <a:spAutoFit/>
+          </a:bodyPr>
+          <a:lstStyle/>
+          <a:p>
+            <a:pPr algn="l"/>
+            <a:r>
+              <a:rPr sz="1000" b="0">
+                <a:solidFill>
+                  <a:srgbClr val="1A1A1A"/>
+                </a:solidFill>
+                <a:latin typeface="Calibri"/>
+              </a:rPr>
+              <a:t>UAE</a:t>
+            </a:r>
+          </a:p>
+        </p:txBody>
+      </p:sp>
+      <p:sp>
+        <p:nvSpPr>
+          <p:cNvPr id="62" name="TextBox 61"/>
+          <p:cNvSpPr txBox="1"/>
+          <p:nvPr/>
+        </p:nvSpPr>
+        <p:spPr>
+          <a:xfrm>
+            <a:off x="3337560" y="5093208"/>
+            <a:ext cx="960120" cy="256032"/>
+          </a:xfrm>
+          <a:prstGeom prst="rect">
+            <a:avLst/>
+          </a:prstGeom>
+          <a:noFill/>
+        </p:spPr>
+        <p:txBody>
+          <a:bodyPr wrap="square" lIns="0" rIns="0" tIns="0" bIns="0" anchor="t">
+            <a:spAutoFit/>
+          </a:bodyPr>
+          <a:lstStyle/>
+          <a:p>
+            <a:pPr algn="r"/>
+            <a:r>
+              <a:rPr sz="1000" b="0">
+                <a:solidFill>
+                  <a:srgbClr val="1A1A1A"/>
+                </a:solidFill>
+                <a:latin typeface="Calibri"/>
+              </a:rPr>
+              <a:t>—</a:t>
+            </a:r>
+          </a:p>
+        </p:txBody>
+      </p:sp>
+      <p:sp>
+        <p:nvSpPr>
+          <p:cNvPr id="63" name="TextBox 62"/>
+          <p:cNvSpPr txBox="1"/>
+          <p:nvPr/>
+        </p:nvSpPr>
+        <p:spPr>
+          <a:xfrm>
+            <a:off x="4343400" y="5093208"/>
+            <a:ext cx="594359" cy="256032"/>
+          </a:xfrm>
+          <a:prstGeom prst="rect">
+            <a:avLst/>
+          </a:prstGeom>
+          <a:noFill/>
+        </p:spPr>
+        <p:txBody>
+          <a:bodyPr wrap="square" lIns="0" rIns="0" tIns="0" bIns="0" anchor="t">
+            <a:spAutoFit/>
+          </a:bodyPr>
+          <a:lstStyle/>
+          <a:p>
+            <a:pPr algn="r"/>
+            <a:r>
+              <a:rPr sz="1000" b="0">
+                <a:solidFill>
+                  <a:srgbClr val="1A1A1A"/>
+                </a:solidFill>
+                <a:latin typeface="Calibri"/>
+              </a:rPr>
+              <a:t>—</a:t>
+            </a:r>
+          </a:p>
+        </p:txBody>
+      </p:sp>
+      <p:sp>
+        <p:nvSpPr>
+          <p:cNvPr id="64" name="TextBox 63"/>
+          <p:cNvSpPr txBox="1"/>
+          <p:nvPr/>
+        </p:nvSpPr>
+        <p:spPr>
+          <a:xfrm>
+            <a:off x="4983480" y="5093208"/>
+            <a:ext cx="685800" cy="256032"/>
+          </a:xfrm>
+          <a:prstGeom prst="rect">
+            <a:avLst/>
+          </a:prstGeom>
+          <a:noFill/>
+        </p:spPr>
+        <p:txBody>
+          <a:bodyPr wrap="square" lIns="0" rIns="0" tIns="0" bIns="0" anchor="t">
+            <a:spAutoFit/>
+          </a:bodyPr>
+          <a:lstStyle/>
+          <a:p>
+            <a:pPr algn="r"/>
+            <a:r>
+              <a:rPr sz="1000" b="0">
+                <a:solidFill>
+                  <a:srgbClr val="1A1A1A"/>
+                </a:solidFill>
+                <a:latin typeface="Calibri"/>
+              </a:rPr>
+              <a:t>—</a:t>
+            </a:r>
+          </a:p>
+        </p:txBody>
+      </p:sp>
+      <p:sp>
+        <p:nvSpPr>
+          <p:cNvPr id="65" name="TextBox 64"/>
+          <p:cNvSpPr txBox="1"/>
+          <p:nvPr/>
+        </p:nvSpPr>
+        <p:spPr>
+          <a:xfrm>
+            <a:off x="5715000" y="5093208"/>
+            <a:ext cx="685800" cy="256032"/>
+          </a:xfrm>
+          <a:prstGeom prst="rect">
+            <a:avLst/>
+          </a:prstGeom>
+          <a:noFill/>
+        </p:spPr>
+        <p:txBody>
+          <a:bodyPr wrap="square" lIns="0" rIns="0" tIns="0" bIns="0" anchor="t">
+            <a:spAutoFit/>
+          </a:bodyPr>
+          <a:lstStyle/>
+          <a:p>
+            <a:pPr algn="r"/>
+            <a:r>
+              <a:rPr sz="1000" b="0">
+                <a:solidFill>
+                  <a:srgbClr val="1A1A1A"/>
+                </a:solidFill>
+                <a:latin typeface="Calibri"/>
+              </a:rPr>
+              <a:t>—</a:t>
+            </a:r>
+          </a:p>
+        </p:txBody>
+      </p:sp>
+      <p:sp>
+        <p:nvSpPr>
+          <p:cNvPr id="66" name="Rectangle 65"/>
           <p:cNvSpPr/>
           <p:nvPr/>
         </p:nvSpPr>
@@ -9908,7 +11549,7 @@
       </p:sp>
       <p:sp>
         <p:nvSpPr>
-          <p:cNvPr id="24" name="TextBox 23"/>
+          <p:cNvPr id="67" name="TextBox 66"/>
           <p:cNvSpPr txBox="1"/>
           <p:nvPr/>
         </p:nvSpPr>
@@ -9943,7 +11584,7 @@
       </p:sp>
       <p:sp>
         <p:nvSpPr>
-          <p:cNvPr id="25" name="Rectangle 24"/>
+          <p:cNvPr id="68" name="Rectangle 67"/>
           <p:cNvSpPr/>
           <p:nvPr/>
         </p:nvSpPr>
@@ -9989,7 +11630,7 @@
       </p:sp>
       <p:sp>
         <p:nvSpPr>
-          <p:cNvPr id="26" name="Rectangle 25"/>
+          <p:cNvPr id="69" name="Rectangle 68"/>
           <p:cNvSpPr/>
           <p:nvPr/>
         </p:nvSpPr>
@@ -10033,7 +11674,7 @@
       </p:sp>
       <p:sp>
         <p:nvSpPr>
-          <p:cNvPr id="27" name="TextBox 26"/>
+          <p:cNvPr id="70" name="TextBox 69"/>
           <p:cNvSpPr txBox="1"/>
           <p:nvPr/>
         </p:nvSpPr>
@@ -10068,14 +11709,14 @@
       </p:sp>
       <p:sp>
         <p:nvSpPr>
-          <p:cNvPr id="28" name="Rectangle 27"/>
+          <p:cNvPr id="71" name="Rectangle 70"/>
           <p:cNvSpPr/>
           <p:nvPr/>
         </p:nvSpPr>
         <p:spPr>
           <a:xfrm>
             <a:off x="521208" y="8220456"/>
-            <a:ext cx="1062920" cy="146304"/>
+            <a:ext cx="1565909" cy="146304"/>
           </a:xfrm>
           <a:prstGeom prst="rect">
             <a:avLst/>
@@ -10111,14 +11752,14 @@
       </p:sp>
       <p:sp>
         <p:nvSpPr>
-          <p:cNvPr id="29" name="Rectangle 28"/>
+          <p:cNvPr id="72" name="Rectangle 71"/>
           <p:cNvSpPr/>
           <p:nvPr/>
         </p:nvSpPr>
         <p:spPr>
           <a:xfrm>
-            <a:off x="1584128" y="8220456"/>
-            <a:ext cx="303691" cy="146304"/>
+            <a:off x="2087117" y="8220456"/>
+            <a:ext cx="104393" cy="146304"/>
           </a:xfrm>
           <a:prstGeom prst="rect">
             <a:avLst/>
@@ -10154,50 +11795,7 @@
       </p:sp>
       <p:sp>
         <p:nvSpPr>
-          <p:cNvPr id="30" name="Rectangle 29"/>
-          <p:cNvSpPr/>
-          <p:nvPr/>
-        </p:nvSpPr>
-        <p:spPr>
-          <a:xfrm>
-            <a:off x="1887820" y="8220456"/>
-            <a:ext cx="303691" cy="146304"/>
-          </a:xfrm>
-          <a:prstGeom prst="rect">
-            <a:avLst/>
-          </a:prstGeom>
-          <a:solidFill>
-            <a:srgbClr val="B83227"/>
-          </a:solidFill>
-          <a:ln>
-            <a:noFill/>
-          </a:ln>
-        </p:spPr>
-        <p:style>
-          <a:lnRef idx="1">
-            <a:schemeClr val="accent1"/>
-          </a:lnRef>
-          <a:fillRef idx="3">
-            <a:schemeClr val="accent1"/>
-          </a:fillRef>
-          <a:effectRef idx="2">
-            <a:schemeClr val="accent1"/>
-          </a:effectRef>
-          <a:fontRef idx="minor">
-            <a:schemeClr val="lt1"/>
-          </a:fontRef>
-        </p:style>
-        <p:txBody>
-          <a:bodyPr rtlCol="0" anchor="ctr"/>
-          <a:lstStyle/>
-          <a:p>
-            <a:pPr algn="ctr"/>
-          </a:p>
-        </p:txBody>
-      </p:sp>
-      <p:sp>
-        <p:nvSpPr>
-          <p:cNvPr id="31" name="TextBox 30"/>
+          <p:cNvPr id="73" name="TextBox 72"/>
           <p:cNvSpPr txBox="1"/>
           <p:nvPr/>
         </p:nvSpPr>
@@ -10225,14 +11823,14 @@
                 </a:solidFill>
                 <a:latin typeface="Calibri"/>
               </a:rPr>
-              <a:t>Buy 63%   Hold 18%   Sell 18%</a:t>
-            </a:r>
-          </a:p>
-        </p:txBody>
-      </p:sp>
-      <p:sp>
-        <p:nvSpPr>
-          <p:cNvPr id="32" name="TextBox 31"/>
+              <a:t>Buy 93%   Hold 6%   Sell 0%</a:t>
+            </a:r>
+          </a:p>
+        </p:txBody>
+      </p:sp>
+      <p:sp>
+        <p:nvSpPr>
+          <p:cNvPr id="74" name="TextBox 73"/>
           <p:cNvSpPr txBox="1"/>
           <p:nvPr/>
         </p:nvSpPr>
@@ -10260,14 +11858,14 @@
                 </a:solidFill>
                 <a:latin typeface="Calibri"/>
               </a:rPr>
-              <a:t>11 analysts covering</a:t>
-            </a:r>
-          </a:p>
-        </p:txBody>
-      </p:sp>
-      <p:sp>
-        <p:nvSpPr>
-          <p:cNvPr id="33" name="Rectangle 32"/>
+              <a:t>16 analysts covering</a:t>
+            </a:r>
+          </a:p>
+        </p:txBody>
+      </p:sp>
+      <p:sp>
+        <p:nvSpPr>
+          <p:cNvPr id="75" name="Rectangle 74"/>
           <p:cNvSpPr/>
           <p:nvPr/>
         </p:nvSpPr>
@@ -10313,7 +11911,7 @@
       </p:sp>
       <p:sp>
         <p:nvSpPr>
-          <p:cNvPr id="34" name="Rectangle 33"/>
+          <p:cNvPr id="76" name="Rectangle 75"/>
           <p:cNvSpPr/>
           <p:nvPr/>
         </p:nvSpPr>
@@ -10357,7 +11955,7 @@
       </p:sp>
       <p:sp>
         <p:nvSpPr>
-          <p:cNvPr id="35" name="TextBox 34"/>
+          <p:cNvPr id="77" name="TextBox 76"/>
           <p:cNvSpPr txBox="1"/>
           <p:nvPr/>
         </p:nvSpPr>
@@ -10392,7 +11990,7 @@
       </p:sp>
       <p:sp>
         <p:nvSpPr>
-          <p:cNvPr id="36" name="TextBox 35"/>
+          <p:cNvPr id="78" name="TextBox 77"/>
           <p:cNvSpPr txBox="1"/>
           <p:nvPr/>
         </p:nvSpPr>
@@ -10420,14 +12018,14 @@
                 </a:solidFill>
                 <a:latin typeface="Calibri"/>
               </a:rPr>
-              <a:t> 11.32</a:t>
-            </a:r>
-          </a:p>
-        </p:txBody>
-      </p:sp>
-      <p:sp>
-        <p:nvSpPr>
-          <p:cNvPr id="37" name="TextBox 36"/>
+              <a:t>AED 17.73</a:t>
+            </a:r>
+          </a:p>
+        </p:txBody>
+      </p:sp>
+      <p:sp>
+        <p:nvSpPr>
+          <p:cNvPr id="79" name="TextBox 78"/>
           <p:cNvSpPr txBox="1"/>
           <p:nvPr/>
         </p:nvSpPr>
@@ -10455,14 +12053,49 @@
                 </a:solidFill>
                 <a:latin typeface="Calibri"/>
               </a:rPr>
-              <a:t>Range   9 — 14</a:t>
-            </a:r>
-          </a:p>
-        </p:txBody>
-      </p:sp>
-      <p:sp>
-        <p:nvSpPr>
-          <p:cNvPr id="38" name="Rectangle 37"/>
+              <a:t>Range  AED 16 — 20</a:t>
+            </a:r>
+          </a:p>
+        </p:txBody>
+      </p:sp>
+      <p:sp>
+        <p:nvSpPr>
+          <p:cNvPr id="80" name="TextBox 79"/>
+          <p:cNvSpPr txBox="1"/>
+          <p:nvPr/>
+        </p:nvSpPr>
+        <p:spPr>
+          <a:xfrm>
+            <a:off x="2593848" y="8750808"/>
+            <a:ext cx="1706879" cy="164592"/>
+          </a:xfrm>
+          <a:prstGeom prst="rect">
+            <a:avLst/>
+          </a:prstGeom>
+          <a:noFill/>
+        </p:spPr>
+        <p:txBody>
+          <a:bodyPr wrap="square" lIns="0" rIns="0" tIns="0" bIns="0" anchor="t">
+            <a:spAutoFit/>
+          </a:bodyPr>
+          <a:lstStyle/>
+          <a:p>
+            <a:pPr algn="l"/>
+            <a:r>
+              <a:rPr sz="900" b="0">
+                <a:solidFill>
+                  <a:srgbClr val="2F7D4F"/>
+                </a:solidFill>
+                <a:latin typeface="Calibri"/>
+              </a:rPr>
+              <a:t>Implied +25.9% vs last close</a:t>
+            </a:r>
+          </a:p>
+        </p:txBody>
+      </p:sp>
+      <p:sp>
+        <p:nvSpPr>
+          <p:cNvPr id="81" name="Rectangle 80"/>
           <p:cNvSpPr/>
           <p:nvPr/>
         </p:nvSpPr>
@@ -10508,7 +12141,7 @@
       </p:sp>
       <p:sp>
         <p:nvSpPr>
-          <p:cNvPr id="39" name="Rectangle 38"/>
+          <p:cNvPr id="82" name="Rectangle 81"/>
           <p:cNvSpPr/>
           <p:nvPr/>
         </p:nvSpPr>
@@ -10552,7 +12185,7 @@
       </p:sp>
       <p:sp>
         <p:nvSpPr>
-          <p:cNvPr id="40" name="TextBox 39"/>
+          <p:cNvPr id="83" name="TextBox 82"/>
           <p:cNvSpPr txBox="1"/>
           <p:nvPr/>
         </p:nvSpPr>
@@ -10587,7 +12220,7 @@
       </p:sp>
       <p:sp>
         <p:nvSpPr>
-          <p:cNvPr id="41" name="TextBox 40"/>
+          <p:cNvPr id="84" name="TextBox 83"/>
           <p:cNvSpPr txBox="1"/>
           <p:nvPr/>
         </p:nvSpPr>
@@ -10615,14 +12248,14 @@
                 </a:solidFill>
                 <a:latin typeface="Calibri"/>
               </a:rPr>
-              <a:t>Feb. 11</a:t>
-            </a:r>
-          </a:p>
-        </p:txBody>
-      </p:sp>
-      <p:sp>
-        <p:nvSpPr>
-          <p:cNvPr id="42" name="TextBox 41"/>
+              <a:t>Apr. 28</a:t>
+            </a:r>
+          </a:p>
+        </p:txBody>
+      </p:sp>
+      <p:sp>
+        <p:nvSpPr>
+          <p:cNvPr id="85" name="TextBox 84"/>
           <p:cNvSpPr txBox="1"/>
           <p:nvPr/>
         </p:nvSpPr>
@@ -10650,14 +12283,14 @@
                 </a:solidFill>
                 <a:latin typeface="Calibri"/>
               </a:rPr>
-              <a:t>FAB Adjusts Aldar Properties Rating, Price Target After Q4 2025 Net Profit Beat</a:t>
-            </a:r>
-          </a:p>
-        </p:txBody>
-      </p:sp>
-      <p:sp>
-        <p:nvSpPr>
-          <p:cNvPr id="43" name="TextBox 42"/>
+              <a:t>United Securities Upgrades Abu Dhabi Commercial Bank to Strong Buy After Q1 Beat</a:t>
+            </a:r>
+          </a:p>
+        </p:txBody>
+      </p:sp>
+      <p:sp>
+        <p:nvSpPr>
+          <p:cNvPr id="86" name="TextBox 85"/>
           <p:cNvSpPr txBox="1"/>
           <p:nvPr/>
         </p:nvSpPr>
@@ -10685,14 +12318,14 @@
                 </a:solidFill>
                 <a:latin typeface="Calibri"/>
               </a:rPr>
-              <a:t>Jan. 28</a:t>
-            </a:r>
-          </a:p>
-        </p:txBody>
-      </p:sp>
-      <p:sp>
-        <p:nvSpPr>
-          <p:cNvPr id="44" name="TextBox 43"/>
+              <a:t>Feb. 03</a:t>
+            </a:r>
+          </a:p>
+        </p:txBody>
+      </p:sp>
+      <p:sp>
+        <p:nvSpPr>
+          <p:cNvPr id="87" name="TextBox 86"/>
           <p:cNvSpPr txBox="1"/>
           <p:nvPr/>
         </p:nvSpPr>
@@ -10720,14 +12353,14 @@
                 </a:solidFill>
                 <a:latin typeface="Calibri"/>
               </a:rPr>
-              <a:t>BofA Expects Aldar Properties to Hit Top of FY25 Sales Outlook, Notes 'Surging' FY26 Presales</a:t>
-            </a:r>
-          </a:p>
-        </p:txBody>
-      </p:sp>
-      <p:sp>
-        <p:nvSpPr>
-          <p:cNvPr id="45" name="TextBox 44"/>
+              <a:t>Abu Dhabi Commercial Bank Kept at Buy as FAB Notes Q4 2025 Results</a:t>
+            </a:r>
+          </a:p>
+        </p:txBody>
+      </p:sp>
+      <p:sp>
+        <p:nvSpPr>
+          <p:cNvPr id="88" name="TextBox 87"/>
           <p:cNvSpPr txBox="1"/>
           <p:nvPr/>
         </p:nvSpPr>
@@ -10755,14 +12388,14 @@
                 </a:solidFill>
                 <a:latin typeface="Calibri"/>
               </a:rPr>
-              <a:t>25-10-31</a:t>
-            </a:r>
-          </a:p>
-        </p:txBody>
-      </p:sp>
-      <p:sp>
-        <p:nvSpPr>
-          <p:cNvPr id="46" name="TextBox 45"/>
+              <a:t>Feb. 02</a:t>
+            </a:r>
+          </a:p>
+        </p:txBody>
+      </p:sp>
+      <p:sp>
+        <p:nvSpPr>
+          <p:cNvPr id="89" name="TextBox 88"/>
           <p:cNvSpPr txBox="1"/>
           <p:nvPr/>
         </p:nvSpPr>
@@ -10790,14 +12423,14 @@
                 </a:solidFill>
                 <a:latin typeface="Calibri"/>
               </a:rPr>
-              <a:t>Aldar Properties Q3 Net Profit In Line with FAB Securities Estimate</a:t>
-            </a:r>
-          </a:p>
-        </p:txBody>
-      </p:sp>
-      <p:sp>
-        <p:nvSpPr>
-          <p:cNvPr id="47" name="Rectangle 46"/>
+              <a:t>United Securities Keeps Abu Dhabi Commercial Bank at Buy Post-FY25 Earnings Beat</a:t>
+            </a:r>
+          </a:p>
+        </p:txBody>
+      </p:sp>
+      <p:sp>
+        <p:nvSpPr>
+          <p:cNvPr id="90" name="Rectangle 89"/>
           <p:cNvSpPr/>
           <p:nvPr/>
         </p:nvSpPr>
@@ -10841,7 +12474,7 @@
       </p:sp>
       <p:sp>
         <p:nvSpPr>
-          <p:cNvPr id="48" name="TextBox 47"/>
+          <p:cNvPr id="91" name="TextBox 90"/>
           <p:cNvSpPr txBox="1"/>
           <p:nvPr/>
         </p:nvSpPr>
@@ -10869,14 +12502,14 @@
                 </a:solidFill>
                 <a:latin typeface="Calibri"/>
               </a:rPr>
-              <a:t>Source: investing, marketscreener  |  Generated 13 May 2026  |  Analyst: Jabal Research</a:t>
-            </a:r>
-          </a:p>
-        </p:txBody>
-      </p:sp>
-      <p:sp>
-        <p:nvSpPr>
-          <p:cNvPr id="49" name="TextBox 48"/>
+              <a:t>Source: investing, ishares, marketscreener  |  Generated 13 May 2026  |  Analyst: Jabal Research</a:t>
+            </a:r>
+          </a:p>
+        </p:txBody>
+      </p:sp>
+      <p:sp>
+        <p:nvSpPr>
+          <p:cNvPr id="92" name="TextBox 91"/>
           <p:cNvSpPr txBox="1"/>
           <p:nvPr/>
         </p:nvSpPr>
@@ -10911,7 +12544,7 @@
       </p:sp>
       <p:sp>
         <p:nvSpPr>
-          <p:cNvPr id="50" name="TextBox 49"/>
+          <p:cNvPr id="93" name="TextBox 92"/>
           <p:cNvSpPr txBox="1"/>
           <p:nvPr/>
         </p:nvSpPr>
@@ -10946,7 +12579,7 @@
       </p:sp>
       <p:sp>
         <p:nvSpPr>
-          <p:cNvPr id="51" name="TextBox 50"/>
+          <p:cNvPr id="94" name="TextBox 93"/>
           <p:cNvSpPr txBox="1"/>
           <p:nvPr/>
         </p:nvSpPr>

--- a/static/decks/ADCB.AE.pptx
+++ b/static/decks/ADCB.AE.pptx
@@ -11393,7 +11393,7 @@
                 </a:solidFill>
                 <a:latin typeface="Calibri"/>
               </a:rPr>
-              <a:t>—</a:t>
+              <a:t>$272M</a:t>
             </a:r>
           </a:p>
         </p:txBody>
@@ -11463,7 +11463,7 @@
                 </a:solidFill>
                 <a:latin typeface="Calibri"/>
               </a:rPr>
-              <a:t>—</a:t>
+              <a:t>+21.6% YTD</a:t>
             </a:r>
           </a:p>
         </p:txBody>
@@ -11494,11 +11494,11 @@
             <a:r>
               <a:rPr sz="1000" b="0">
                 <a:solidFill>
-                  <a:srgbClr val="1A1A1A"/>
-                </a:solidFill>
-                <a:latin typeface="Calibri"/>
-              </a:rPr>
-              <a:t>—</a:t>
+                  <a:srgbClr val="2F7D4F"/>
+                </a:solidFill>
+                <a:latin typeface="Calibri"/>
+              </a:rPr>
+              <a:t>+12.6%</a:t>
             </a:r>
           </a:p>
         </p:txBody>

--- a/static/decks/ADCB.AE.pptx
+++ b/static/decks/ADCB.AE.pptx
@@ -6002,7 +6002,7 @@
                 </a:solidFill>
                 <a:latin typeface="Calibri"/>
               </a:rPr>
-              <a:t>Source: investing, ishares, marketscreener  |  Generated 13 May 2026  |  Analyst: Jabal Research</a:t>
+              <a:t>Source: investing, ishares, marketscreener  |  Generated 14 May 2026  |  Analyst: Jabal Research</a:t>
             </a:r>
           </a:p>
         </p:txBody>
@@ -8963,7 +8963,7 @@
                 </a:solidFill>
                 <a:latin typeface="Calibri"/>
               </a:rPr>
-              <a:t>Source: investing, ishares, marketscreener  |  Generated 13 May 2026  |  Analyst: Jabal Research</a:t>
+              <a:t>Source: investing, ishares, marketscreener  |  Generated 14 May 2026  |  Analyst: Jabal Research</a:t>
             </a:r>
           </a:p>
         </p:txBody>
@@ -12502,7 +12502,7 @@
                 </a:solidFill>
                 <a:latin typeface="Calibri"/>
               </a:rPr>
-              <a:t>Source: investing, ishares, marketscreener  |  Generated 13 May 2026  |  Analyst: Jabal Research</a:t>
+              <a:t>Source: investing, ishares, marketscreener  |  Generated 14 May 2026  |  Analyst: Jabal Research</a:t>
             </a:r>
           </a:p>
         </p:txBody>
